--- a/cursos/recursos/fundamentos-del-ajedrez/10-errores-comunes-de-apertura.pptx
+++ b/cursos/recursos/fundamentos-del-ajedrez/10-errores-comunes-de-apertura.pptx
@@ -1602,7 +1602,7 @@
                 <a:ea typeface="Calibri" pitchFamily="34" charset="-122"/>
                 <a:cs typeface="Calibri" pitchFamily="34" charset="-120"/>
               </a:rPr>
-              <a:t>El "jaque pastor" (1.e4 e5 2.Bc4 Nc6 3.Qh5) amenaza mate en f7 aprovechando que esa casilla solo la defiende el rey.</a:t>
+              <a:t>El "jaque pastor" (1.e4 e5 2.Ac4 Cc6 3.Dh5) amenaza mate en f7 aprovechando que esa casilla solo la defiende el rey.</a:t>
             </a:r>
             <a:endParaRPr lang="en-US" sz="1600" dirty="0"/>
           </a:p>
@@ -1626,7 +1626,7 @@
                 <a:ea typeface="Calibri" pitchFamily="34" charset="-122"/>
                 <a:cs typeface="Calibri" pitchFamily="34" charset="-120"/>
               </a:rPr>
-              <a:t>Se defiende fácilmente desarrollando una pieza que controle f7 o ataque a la dama, como 3...g6 o 3...Nf6.</a:t>
+              <a:t>Se defiende fácilmente desarrollando una pieza que controle f7 o ataque a la dama, como 3...g6 o 3...Cf6.</a:t>
             </a:r>
             <a:endParaRPr lang="en-US" sz="1600" dirty="0"/>
           </a:p>
